--- a/classes/parte-3-estadistica-inferencial/188-inferencia-causal-dags-confounders-instrumentos/clase-188-inferencia-causal-dags-confounders-instrumentos-presentacion.pptx
+++ b/classes/parte-3-estadistica-inferencial/188-inferencia-causal-dags-confounders-instrumentos/clase-188-inferencia-causal-dags-confounders-instrumentos-presentacion.pptx
@@ -4845,7 +4845,7 @@
                 </a:solidFill>
                 <a:latin typeface="Segoe UI"/>
               </a:rPr>
-              <a:t>Primer bloque ejecutable del notebook.</a:t>
+              <a:t>T ← Z → Y. Z causa tanto T como Y. El OLS ingenuo Y~T está sesgado; ajustar por Z recupera el efecto causal (backdoor criterion).</a:t>
             </a:r>
           </a:p>
         </p:txBody>
@@ -4932,7 +4932,368 @@
                 </a:solidFill>
                 <a:latin typeface="Courier New"/>
               </a:rPr>
-              <a:t># Imports y configuración inicial</a:t>
+              <a:t>import numpy as np</a:t>
+            </a:r>
+          </a:p>
+          <a:p>
+            <a:pPr>
+              <a:defRPr sz="1200" b="0">
+                <a:solidFill>
+                  <a:srgbClr val="F8FAFC"/>
+                </a:solidFill>
+                <a:latin typeface="Courier New"/>
+              </a:defRPr>
+            </a:pPr>
+            <a:r>
+              <a:rPr sz="1200" b="0">
+                <a:solidFill>
+                  <a:srgbClr val="F8FAFC"/>
+                </a:solidFill>
+                <a:latin typeface="Courier New"/>
+              </a:rPr>
+              <a:t>import pandas as pd</a:t>
+            </a:r>
+          </a:p>
+          <a:p>
+            <a:pPr>
+              <a:defRPr sz="1200" b="0">
+                <a:solidFill>
+                  <a:srgbClr val="F8FAFC"/>
+                </a:solidFill>
+                <a:latin typeface="Courier New"/>
+              </a:defRPr>
+            </a:pPr>
+            <a:r>
+              <a:rPr sz="1200" b="0">
+                <a:solidFill>
+                  <a:srgbClr val="F8FAFC"/>
+                </a:solidFill>
+                <a:latin typeface="Courier New"/>
+              </a:rPr>
+              <a:t>import statsmodels.api as sm</a:t>
+            </a:r>
+          </a:p>
+          <a:p>
+            <a:pPr>
+              <a:defRPr sz="1200" b="0">
+                <a:solidFill>
+                  <a:srgbClr val="F8FAFC"/>
+                </a:solidFill>
+                <a:latin typeface="Courier New"/>
+              </a:defRPr>
+            </a:pPr>
+            <a:r>
+              <a:rPr sz="1200" b="0">
+                <a:solidFill>
+                  <a:srgbClr val="F8FAFC"/>
+                </a:solidFill>
+                <a:latin typeface="Courier New"/>
+              </a:rPr>
+              <a:t>import statsmodels.formula.api as smf</a:t>
+            </a:r>
+          </a:p>
+          <a:p>
+            <a:pPr>
+              <a:defRPr sz="1200" b="0">
+                <a:solidFill>
+                  <a:srgbClr val="F8FAFC"/>
+                </a:solidFill>
+                <a:latin typeface="Courier New"/>
+              </a:defRPr>
+            </a:pPr>
+            <a:r>
+              <a:rPr sz="1200" b="0">
+                <a:solidFill>
+                  <a:srgbClr val="F8FAFC"/>
+                </a:solidFill>
+                <a:latin typeface="Courier New"/>
+              </a:rPr>
+              <a:t>from statsmodels.sandbox.regression.gmm import IV2SLS</a:t>
+            </a:r>
+          </a:p>
+          <a:p>
+            <a:pPr>
+              <a:defRPr sz="1200" b="0">
+                <a:solidFill>
+                  <a:srgbClr val="F8FAFC"/>
+                </a:solidFill>
+                <a:latin typeface="Courier New"/>
+              </a:defRPr>
+            </a:pPr>
+            <a:r>
+              <a:rPr sz="1200" b="0">
+                <a:solidFill>
+                  <a:srgbClr val="F8FAFC"/>
+                </a:solidFill>
+                <a:latin typeface="Courier New"/>
+              </a:rPr>
+              <a:t>import matplotlib.pyplot as plt</a:t>
+            </a:r>
+          </a:p>
+          <a:p>
+            <a:pPr>
+              <a:defRPr sz="1200" b="0">
+                <a:solidFill>
+                  <a:srgbClr val="F8FAFC"/>
+                </a:solidFill>
+                <a:latin typeface="Courier New"/>
+              </a:defRPr>
+            </a:pPr>
+            <a:r>
+              <a:rPr sz="1200" b="0">
+                <a:solidFill>
+                  <a:srgbClr val="F8FAFC"/>
+                </a:solidFill>
+                <a:latin typeface="Courier New"/>
+              </a:rPr>
+              <a:t> </a:t>
+            </a:r>
+          </a:p>
+          <a:p>
+            <a:pPr>
+              <a:defRPr sz="1200" b="0">
+                <a:solidFill>
+                  <a:srgbClr val="F8FAFC"/>
+                </a:solidFill>
+                <a:latin typeface="Courier New"/>
+              </a:defRPr>
+            </a:pPr>
+            <a:r>
+              <a:rPr sz="1200" b="0">
+                <a:solidFill>
+                  <a:srgbClr val="F8FAFC"/>
+                </a:solidFill>
+                <a:latin typeface="Courier New"/>
+              </a:rPr>
+              <a:t>rng = np.random.default_rng(42)</a:t>
+            </a:r>
+          </a:p>
+          <a:p>
+            <a:pPr>
+              <a:defRPr sz="1200" b="0">
+                <a:solidFill>
+                  <a:srgbClr val="F8FAFC"/>
+                </a:solidFill>
+                <a:latin typeface="Courier New"/>
+              </a:defRPr>
+            </a:pPr>
+            <a:r>
+              <a:rPr sz="1200" b="0">
+                <a:solidFill>
+                  <a:srgbClr val="F8FAFC"/>
+                </a:solidFill>
+                <a:latin typeface="Courier New"/>
+              </a:rPr>
+              <a:t> </a:t>
+            </a:r>
+          </a:p>
+          <a:p>
+            <a:pPr>
+              <a:defRPr sz="1200" b="0">
+                <a:solidFill>
+                  <a:srgbClr val="F8FAFC"/>
+                </a:solidFill>
+                <a:latin typeface="Courier New"/>
+              </a:defRPr>
+            </a:pPr>
+            <a:r>
+              <a:rPr sz="1200" b="0">
+                <a:solidFill>
+                  <a:srgbClr val="F8FAFC"/>
+                </a:solidFill>
+                <a:latin typeface="Courier New"/>
+              </a:rPr>
+              <a:t>n = 5000</a:t>
+            </a:r>
+          </a:p>
+          <a:p>
+            <a:pPr>
+              <a:defRPr sz="1200" b="0">
+                <a:solidFill>
+                  <a:srgbClr val="F8FAFC"/>
+                </a:solidFill>
+                <a:latin typeface="Courier New"/>
+              </a:defRPr>
+            </a:pPr>
+            <a:r>
+              <a:rPr sz="1200" b="0">
+                <a:solidFill>
+                  <a:srgbClr val="F8FAFC"/>
+                </a:solidFill>
+                <a:latin typeface="Courier New"/>
+              </a:rPr>
+              <a:t>Z = rng.normal(0, 1, n)                     # confounder</a:t>
+            </a:r>
+          </a:p>
+          <a:p>
+            <a:pPr>
+              <a:defRPr sz="1200" b="0">
+                <a:solidFill>
+                  <a:srgbClr val="F8FAFC"/>
+                </a:solidFill>
+                <a:latin typeface="Courier New"/>
+              </a:defRPr>
+            </a:pPr>
+            <a:r>
+              <a:rPr sz="1200" b="0">
+                <a:solidFill>
+                  <a:srgbClr val="F8FAFC"/>
+                </a:solidFill>
+                <a:latin typeface="Courier New"/>
+              </a:rPr>
+              <a:t>T = 0.8 * Z + rng.normal(0, 1, n)           # tratamiento depende de Z</a:t>
+            </a:r>
+          </a:p>
+          <a:p>
+            <a:pPr>
+              <a:defRPr sz="1200" b="0">
+                <a:solidFill>
+                  <a:srgbClr val="F8FAFC"/>
+                </a:solidFill>
+                <a:latin typeface="Courier New"/>
+              </a:defRPr>
+            </a:pPr>
+            <a:r>
+              <a:rPr sz="1200" b="0">
+                <a:solidFill>
+                  <a:srgbClr val="F8FAFC"/>
+                </a:solidFill>
+                <a:latin typeface="Courier New"/>
+              </a:rPr>
+              <a:t>Y = 2.0 * T + 3.0 * Z + rng.normal(0, 1, n) # efecto causal verdadero de T = 2.0</a:t>
+            </a:r>
+          </a:p>
+          <a:p>
+            <a:pPr>
+              <a:defRPr sz="1200" b="0">
+                <a:solidFill>
+                  <a:srgbClr val="F8FAFC"/>
+                </a:solidFill>
+                <a:latin typeface="Courier New"/>
+              </a:defRPr>
+            </a:pPr>
+            <a:r>
+              <a:rPr sz="1200" b="0">
+                <a:solidFill>
+                  <a:srgbClr val="F8FAFC"/>
+                </a:solidFill>
+                <a:latin typeface="Courier New"/>
+              </a:rPr>
+              <a:t>df = pd.DataFrame({"Y": Y, "T": T, "Z": Z})</a:t>
+            </a:r>
+          </a:p>
+          <a:p>
+            <a:pPr>
+              <a:defRPr sz="1200" b="0">
+                <a:solidFill>
+                  <a:srgbClr val="F8FAFC"/>
+                </a:solidFill>
+                <a:latin typeface="Courier New"/>
+              </a:defRPr>
+            </a:pPr>
+            <a:r>
+              <a:rPr sz="1200" b="0">
+                <a:solidFill>
+                  <a:srgbClr val="F8FAFC"/>
+                </a:solidFill>
+                <a:latin typeface="Courier New"/>
+              </a:rPr>
+              <a:t>naive = smf.ols("Y ~ T", data=df).fit().params["T"]</a:t>
+            </a:r>
+          </a:p>
+          <a:p>
+            <a:pPr>
+              <a:defRPr sz="1200" b="0">
+                <a:solidFill>
+                  <a:srgbClr val="F8FAFC"/>
+                </a:solidFill>
+                <a:latin typeface="Courier New"/>
+              </a:defRPr>
+            </a:pPr>
+            <a:r>
+              <a:rPr sz="1200" b="0">
+                <a:solidFill>
+                  <a:srgbClr val="F8FAFC"/>
+                </a:solidFill>
+                <a:latin typeface="Courier New"/>
+              </a:rPr>
+              <a:t>adj   = smf.ols("Y ~ T + Z", data=df).fit().params["T"]</a:t>
+            </a:r>
+          </a:p>
+          <a:p>
+            <a:pPr>
+              <a:defRPr sz="1200" b="0">
+                <a:solidFill>
+                  <a:srgbClr val="F8FAFC"/>
+                </a:solidFill>
+                <a:latin typeface="Courier New"/>
+              </a:defRPr>
+            </a:pPr>
+            <a:r>
+              <a:rPr sz="1200" b="0">
+                <a:solidFill>
+                  <a:srgbClr val="F8FAFC"/>
+                </a:solidFill>
+                <a:latin typeface="Courier New"/>
+              </a:rPr>
+              <a:t>print("efecto verdadero = 2.00")</a:t>
+            </a:r>
+          </a:p>
+          <a:p>
+            <a:pPr>
+              <a:defRPr sz="1200" b="0">
+                <a:solidFill>
+                  <a:srgbClr val="F8FAFC"/>
+                </a:solidFill>
+                <a:latin typeface="Courier New"/>
+              </a:defRPr>
+            </a:pPr>
+            <a:r>
+              <a:rPr sz="1200" b="0">
+                <a:solidFill>
+                  <a:srgbClr val="F8FAFC"/>
+                </a:solidFill>
+                <a:latin typeface="Courier New"/>
+              </a:rPr>
+              <a:t>print(f"OLS ingenuo   Y~T   = {naive:.3f}  (sesgado por Z)")</a:t>
+            </a:r>
+          </a:p>
+          <a:p>
+            <a:pPr>
+              <a:defRPr sz="1200" b="0">
+                <a:solidFill>
+                  <a:srgbClr val="F8FAFC"/>
+                </a:solidFill>
+                <a:latin typeface="Courier New"/>
+              </a:defRPr>
+            </a:pPr>
+            <a:r>
+              <a:rPr sz="1200" b="0">
+                <a:solidFill>
+                  <a:srgbClr val="F8FAFC"/>
+                </a:solidFill>
+                <a:latin typeface="Courier New"/>
+              </a:rPr>
+              <a:t>print(f"OLS ajustado  Y~T+Z = {adj:.3f}  (recupera el efecto)")</a:t>
+            </a:r>
+          </a:p>
+          <a:p>
+            <a:pPr>
+              <a:defRPr sz="1200" b="0">
+                <a:solidFill>
+                  <a:srgbClr val="F8FAFC"/>
+                </a:solidFill>
+                <a:latin typeface="Courier New"/>
+              </a:defRPr>
+            </a:pPr>
+            <a:r>
+              <a:rPr sz="1200" b="0">
+                <a:solidFill>
+                  <a:srgbClr val="F8FAFC"/>
+                </a:solidFill>
+                <a:latin typeface="Courier New"/>
+              </a:rPr>
+              <a:t>assert abs(adj - 2.0) &lt; 0.15 and abs(naive - 2.0) &gt; 0.3</a:t>
             </a:r>
           </a:p>
         </p:txBody>

--- a/classes/parte-3-estadistica-inferencial/188-inferencia-causal-dags-confounders-instrumentos/clase-188-inferencia-causal-dags-confounders-instrumentos-presentacion.pptx
+++ b/classes/parte-3-estadistica-inferencial/188-inferencia-causal-dags-confounders-instrumentos/clase-188-inferencia-causal-dags-confounders-instrumentos-presentacion.pptx
@@ -3272,7 +3272,7 @@
                 </a:solidFill>
                 <a:latin typeface="Segoe UI"/>
               </a:rPr>
-              <a:t>Parte: 3 — Estadística Inferencial y Causal · Fuente: Pearl, The Book of Why + Hernán &amp; Robins, Causal Inference: What If (libro gratuito, 2024) + Imbens &amp; Rubin.  Duración estimada: 95 min.</a:t>
+              <a:t>Parte: 3 — Estadística Inferencial y Causal · Fuente: Pearl, The Book of Why + Hernán &amp; Robins, Causal Inference: What If (libro gratuito, 2024) + Imbens &amp; Rubin.  Duración estimada: 95 min. · Nivel: Avanzado</a:t>
             </a:r>
           </a:p>
         </p:txBody>
@@ -3581,7 +3581,7 @@
                 </a:solidFill>
                 <a:latin typeface="Segoe UI"/>
               </a:rPr>
-              <a:t>Parte: 3 — Estadística Inferencial y Causal · Fuente: Pearl, The Book of Why + Hernán &amp; Robins, Causal Inference: What If (libro gratuito, 2024) + Imbens &amp; Rubin.  Duración estimada: 95 min.</a:t>
+              <a:t>Parte: 3 — Estadística Inferencial y Causal · Fuente: Pearl, The Book of Why + Hernán &amp; Robins, Causal Inference: What If (libro gratuito, 2024) + Imbens &amp; Rubin.  Duración estimada: 95 min. · Nivel: Avanzado</a:t>
             </a:r>
           </a:p>
         </p:txBody>
